--- a/UK Train Rides.pptx
+++ b/UK Train Rides.pptx
@@ -113,6 +113,22 @@
       </a:defRPr>
     </a:lvl9pPr>
   </p:defaultTextStyle>
+  <p:extLst>
+    <p:ext uri="{EFAFB233-063F-42B5-8137-9DF3F51BA10A}">
+      <p15:sldGuideLst xmlns:p15="http://schemas.microsoft.com/office/powerpoint/2012/main">
+        <p15:guide id="1" orient="horz" pos="2160">
+          <p15:clr>
+            <a:srgbClr val="A4A3A4"/>
+          </p15:clr>
+        </p15:guide>
+        <p15:guide id="2" pos="2880">
+          <p15:clr>
+            <a:srgbClr val="A4A3A4"/>
+          </p15:clr>
+        </p15:guide>
+      </p15:sldGuideLst>
+    </p:ext>
+  </p:extLst>
 </p:presentation>
 </file>
 
@@ -154,10 +170,9 @@
           <a:lstStyle/>
           <a:p>
             <a:r>
-              <a:rPr lang="en-US" smtClean="0"/>
+              <a:rPr lang="en-US"/>
               <a:t>Click to edit Master title style</a:t>
             </a:r>
-            <a:endParaRPr lang="en-US"/>
           </a:p>
         </p:txBody>
       </p:sp>
@@ -273,10 +288,9 @@
           </a:lstStyle>
           <a:p>
             <a:r>
-              <a:rPr lang="en-US" smtClean="0"/>
+              <a:rPr lang="en-US"/>
               <a:t>Click to edit Master subtitle style</a:t>
             </a:r>
-            <a:endParaRPr lang="en-US"/>
           </a:p>
         </p:txBody>
       </p:sp>
@@ -298,7 +312,7 @@
             <a:fld id="{4220D634-4DDA-4407-8520-3DB9E0D9BBC1}" type="datetimeFigureOut">
               <a:rPr lang="en-US" smtClean="0"/>
               <a:pPr/>
-              <a:t>10/1/2025</a:t>
+              <a:t>10/3/2025</a:t>
             </a:fld>
             <a:endParaRPr lang="en-US"/>
           </a:p>
@@ -388,10 +402,9 @@
           <a:lstStyle/>
           <a:p>
             <a:r>
-              <a:rPr lang="en-US" smtClean="0"/>
+              <a:rPr lang="en-US"/>
               <a:t>Click to edit Master title style</a:t>
             </a:r>
-            <a:endParaRPr lang="en-US"/>
           </a:p>
         </p:txBody>
       </p:sp>
@@ -412,38 +425,37 @@
           <a:p>
             <a:pPr lvl="0"/>
             <a:r>
-              <a:rPr lang="en-US" smtClean="0"/>
+              <a:rPr lang="en-US"/>
               <a:t>Click to edit Master text styles</a:t>
             </a:r>
           </a:p>
           <a:p>
             <a:pPr lvl="1"/>
             <a:r>
-              <a:rPr lang="en-US" smtClean="0"/>
+              <a:rPr lang="en-US"/>
               <a:t>Second level</a:t>
             </a:r>
           </a:p>
           <a:p>
             <a:pPr lvl="2"/>
             <a:r>
-              <a:rPr lang="en-US" smtClean="0"/>
+              <a:rPr lang="en-US"/>
               <a:t>Third level</a:t>
             </a:r>
           </a:p>
           <a:p>
             <a:pPr lvl="3"/>
             <a:r>
-              <a:rPr lang="en-US" smtClean="0"/>
+              <a:rPr lang="en-US"/>
               <a:t>Fourth level</a:t>
             </a:r>
           </a:p>
           <a:p>
             <a:pPr lvl="4"/>
             <a:r>
-              <a:rPr lang="en-US" smtClean="0"/>
+              <a:rPr lang="en-US"/>
               <a:t>Fifth level</a:t>
             </a:r>
-            <a:endParaRPr lang="en-US"/>
           </a:p>
         </p:txBody>
       </p:sp>
@@ -465,7 +477,7 @@
             <a:fld id="{4220D634-4DDA-4407-8520-3DB9E0D9BBC1}" type="datetimeFigureOut">
               <a:rPr lang="en-US" smtClean="0"/>
               <a:pPr/>
-              <a:t>10/1/2025</a:t>
+              <a:t>10/3/2025</a:t>
             </a:fld>
             <a:endParaRPr lang="en-US"/>
           </a:p>
@@ -560,10 +572,9 @@
           <a:lstStyle/>
           <a:p>
             <a:r>
-              <a:rPr lang="en-US" smtClean="0"/>
+              <a:rPr lang="en-US"/>
               <a:t>Click to edit Master title style</a:t>
             </a:r>
-            <a:endParaRPr lang="en-US"/>
           </a:p>
         </p:txBody>
       </p:sp>
@@ -589,38 +600,37 @@
           <a:p>
             <a:pPr lvl="0"/>
             <a:r>
-              <a:rPr lang="en-US" smtClean="0"/>
+              <a:rPr lang="en-US"/>
               <a:t>Click to edit Master text styles</a:t>
             </a:r>
           </a:p>
           <a:p>
             <a:pPr lvl="1"/>
             <a:r>
-              <a:rPr lang="en-US" smtClean="0"/>
+              <a:rPr lang="en-US"/>
               <a:t>Second level</a:t>
             </a:r>
           </a:p>
           <a:p>
             <a:pPr lvl="2"/>
             <a:r>
-              <a:rPr lang="en-US" smtClean="0"/>
+              <a:rPr lang="en-US"/>
               <a:t>Third level</a:t>
             </a:r>
           </a:p>
           <a:p>
             <a:pPr lvl="3"/>
             <a:r>
-              <a:rPr lang="en-US" smtClean="0"/>
+              <a:rPr lang="en-US"/>
               <a:t>Fourth level</a:t>
             </a:r>
           </a:p>
           <a:p>
             <a:pPr lvl="4"/>
             <a:r>
-              <a:rPr lang="en-US" smtClean="0"/>
+              <a:rPr lang="en-US"/>
               <a:t>Fifth level</a:t>
             </a:r>
-            <a:endParaRPr lang="en-US"/>
           </a:p>
         </p:txBody>
       </p:sp>
@@ -642,7 +652,7 @@
             <a:fld id="{4220D634-4DDA-4407-8520-3DB9E0D9BBC1}" type="datetimeFigureOut">
               <a:rPr lang="en-US" smtClean="0"/>
               <a:pPr/>
-              <a:t>10/1/2025</a:t>
+              <a:t>10/3/2025</a:t>
             </a:fld>
             <a:endParaRPr lang="en-US"/>
           </a:p>
@@ -732,10 +742,9 @@
           <a:lstStyle/>
           <a:p>
             <a:r>
-              <a:rPr lang="en-US" smtClean="0"/>
+              <a:rPr lang="en-US"/>
               <a:t>Click to edit Master title style</a:t>
             </a:r>
-            <a:endParaRPr lang="en-US"/>
           </a:p>
         </p:txBody>
       </p:sp>
@@ -756,38 +765,37 @@
           <a:p>
             <a:pPr lvl="0"/>
             <a:r>
-              <a:rPr lang="en-US" smtClean="0"/>
+              <a:rPr lang="en-US"/>
               <a:t>Click to edit Master text styles</a:t>
             </a:r>
           </a:p>
           <a:p>
             <a:pPr lvl="1"/>
             <a:r>
-              <a:rPr lang="en-US" smtClean="0"/>
+              <a:rPr lang="en-US"/>
               <a:t>Second level</a:t>
             </a:r>
           </a:p>
           <a:p>
             <a:pPr lvl="2"/>
             <a:r>
-              <a:rPr lang="en-US" smtClean="0"/>
+              <a:rPr lang="en-US"/>
               <a:t>Third level</a:t>
             </a:r>
           </a:p>
           <a:p>
             <a:pPr lvl="3"/>
             <a:r>
-              <a:rPr lang="en-US" smtClean="0"/>
+              <a:rPr lang="en-US"/>
               <a:t>Fourth level</a:t>
             </a:r>
           </a:p>
           <a:p>
             <a:pPr lvl="4"/>
             <a:r>
-              <a:rPr lang="en-US" smtClean="0"/>
+              <a:rPr lang="en-US"/>
               <a:t>Fifth level</a:t>
             </a:r>
-            <a:endParaRPr lang="en-US"/>
           </a:p>
         </p:txBody>
       </p:sp>
@@ -809,7 +817,7 @@
             <a:fld id="{4220D634-4DDA-4407-8520-3DB9E0D9BBC1}" type="datetimeFigureOut">
               <a:rPr lang="en-US" smtClean="0"/>
               <a:pPr/>
-              <a:t>10/1/2025</a:t>
+              <a:t>10/3/2025</a:t>
             </a:fld>
             <a:endParaRPr lang="en-US"/>
           </a:p>
@@ -908,10 +916,9 @@
           </a:lstStyle>
           <a:p>
             <a:r>
-              <a:rPr lang="en-US" smtClean="0"/>
+              <a:rPr lang="en-US"/>
               <a:t>Click to edit Master title style</a:t>
             </a:r>
-            <a:endParaRPr lang="en-US"/>
           </a:p>
         </p:txBody>
       </p:sp>
@@ -1028,7 +1035,7 @@
           <a:p>
             <a:pPr lvl="0"/>
             <a:r>
-              <a:rPr lang="en-US" smtClean="0"/>
+              <a:rPr lang="en-US"/>
               <a:t>Click to edit Master text styles</a:t>
             </a:r>
           </a:p>
@@ -1052,7 +1059,7 @@
             <a:fld id="{4220D634-4DDA-4407-8520-3DB9E0D9BBC1}" type="datetimeFigureOut">
               <a:rPr lang="en-US" smtClean="0"/>
               <a:pPr/>
-              <a:t>10/1/2025</a:t>
+              <a:t>10/3/2025</a:t>
             </a:fld>
             <a:endParaRPr lang="en-US"/>
           </a:p>
@@ -1142,10 +1149,9 @@
           <a:lstStyle/>
           <a:p>
             <a:r>
-              <a:rPr lang="en-US" smtClean="0"/>
+              <a:rPr lang="en-US"/>
               <a:t>Click to edit Master title style</a:t>
             </a:r>
-            <a:endParaRPr lang="en-US"/>
           </a:p>
         </p:txBody>
       </p:sp>
@@ -1199,38 +1205,37 @@
           <a:p>
             <a:pPr lvl="0"/>
             <a:r>
-              <a:rPr lang="en-US" smtClean="0"/>
+              <a:rPr lang="en-US"/>
               <a:t>Click to edit Master text styles</a:t>
             </a:r>
           </a:p>
           <a:p>
             <a:pPr lvl="1"/>
             <a:r>
-              <a:rPr lang="en-US" smtClean="0"/>
+              <a:rPr lang="en-US"/>
               <a:t>Second level</a:t>
             </a:r>
           </a:p>
           <a:p>
             <a:pPr lvl="2"/>
             <a:r>
-              <a:rPr lang="en-US" smtClean="0"/>
+              <a:rPr lang="en-US"/>
               <a:t>Third level</a:t>
             </a:r>
           </a:p>
           <a:p>
             <a:pPr lvl="3"/>
             <a:r>
-              <a:rPr lang="en-US" smtClean="0"/>
+              <a:rPr lang="en-US"/>
               <a:t>Fourth level</a:t>
             </a:r>
           </a:p>
           <a:p>
             <a:pPr lvl="4"/>
             <a:r>
-              <a:rPr lang="en-US" smtClean="0"/>
+              <a:rPr lang="en-US"/>
               <a:t>Fifth level</a:t>
             </a:r>
-            <a:endParaRPr lang="en-US"/>
           </a:p>
         </p:txBody>
       </p:sp>
@@ -1284,38 +1289,37 @@
           <a:p>
             <a:pPr lvl="0"/>
             <a:r>
-              <a:rPr lang="en-US" smtClean="0"/>
+              <a:rPr lang="en-US"/>
               <a:t>Click to edit Master text styles</a:t>
             </a:r>
           </a:p>
           <a:p>
             <a:pPr lvl="1"/>
             <a:r>
-              <a:rPr lang="en-US" smtClean="0"/>
+              <a:rPr lang="en-US"/>
               <a:t>Second level</a:t>
             </a:r>
           </a:p>
           <a:p>
             <a:pPr lvl="2"/>
             <a:r>
-              <a:rPr lang="en-US" smtClean="0"/>
+              <a:rPr lang="en-US"/>
               <a:t>Third level</a:t>
             </a:r>
           </a:p>
           <a:p>
             <a:pPr lvl="3"/>
             <a:r>
-              <a:rPr lang="en-US" smtClean="0"/>
+              <a:rPr lang="en-US"/>
               <a:t>Fourth level</a:t>
             </a:r>
           </a:p>
           <a:p>
             <a:pPr lvl="4"/>
             <a:r>
-              <a:rPr lang="en-US" smtClean="0"/>
+              <a:rPr lang="en-US"/>
               <a:t>Fifth level</a:t>
             </a:r>
-            <a:endParaRPr lang="en-US"/>
           </a:p>
         </p:txBody>
       </p:sp>
@@ -1337,7 +1341,7 @@
             <a:fld id="{4220D634-4DDA-4407-8520-3DB9E0D9BBC1}" type="datetimeFigureOut">
               <a:rPr lang="en-US" smtClean="0"/>
               <a:pPr/>
-              <a:t>10/1/2025</a:t>
+              <a:t>10/3/2025</a:t>
             </a:fld>
             <a:endParaRPr lang="en-US"/>
           </a:p>
@@ -1431,10 +1435,9 @@
           </a:lstStyle>
           <a:p>
             <a:r>
-              <a:rPr lang="en-US" smtClean="0"/>
+              <a:rPr lang="en-US"/>
               <a:t>Click to edit Master title style</a:t>
             </a:r>
-            <a:endParaRPr lang="en-US"/>
           </a:p>
         </p:txBody>
       </p:sp>
@@ -1497,7 +1500,7 @@
           <a:p>
             <a:pPr lvl="0"/>
             <a:r>
-              <a:rPr lang="en-US" smtClean="0"/>
+              <a:rPr lang="en-US"/>
               <a:t>Click to edit Master text styles</a:t>
             </a:r>
           </a:p>
@@ -1553,38 +1556,37 @@
           <a:p>
             <a:pPr lvl="0"/>
             <a:r>
-              <a:rPr lang="en-US" smtClean="0"/>
+              <a:rPr lang="en-US"/>
               <a:t>Click to edit Master text styles</a:t>
             </a:r>
           </a:p>
           <a:p>
             <a:pPr lvl="1"/>
             <a:r>
-              <a:rPr lang="en-US" smtClean="0"/>
+              <a:rPr lang="en-US"/>
               <a:t>Second level</a:t>
             </a:r>
           </a:p>
           <a:p>
             <a:pPr lvl="2"/>
             <a:r>
-              <a:rPr lang="en-US" smtClean="0"/>
+              <a:rPr lang="en-US"/>
               <a:t>Third level</a:t>
             </a:r>
           </a:p>
           <a:p>
             <a:pPr lvl="3"/>
             <a:r>
-              <a:rPr lang="en-US" smtClean="0"/>
+              <a:rPr lang="en-US"/>
               <a:t>Fourth level</a:t>
             </a:r>
           </a:p>
           <a:p>
             <a:pPr lvl="4"/>
             <a:r>
-              <a:rPr lang="en-US" smtClean="0"/>
+              <a:rPr lang="en-US"/>
               <a:t>Fifth level</a:t>
             </a:r>
-            <a:endParaRPr lang="en-US"/>
           </a:p>
         </p:txBody>
       </p:sp>
@@ -1647,7 +1649,7 @@
           <a:p>
             <a:pPr lvl="0"/>
             <a:r>
-              <a:rPr lang="en-US" smtClean="0"/>
+              <a:rPr lang="en-US"/>
               <a:t>Click to edit Master text styles</a:t>
             </a:r>
           </a:p>
@@ -1703,38 +1705,37 @@
           <a:p>
             <a:pPr lvl="0"/>
             <a:r>
-              <a:rPr lang="en-US" smtClean="0"/>
+              <a:rPr lang="en-US"/>
               <a:t>Click to edit Master text styles</a:t>
             </a:r>
           </a:p>
           <a:p>
             <a:pPr lvl="1"/>
             <a:r>
-              <a:rPr lang="en-US" smtClean="0"/>
+              <a:rPr lang="en-US"/>
               <a:t>Second level</a:t>
             </a:r>
           </a:p>
           <a:p>
             <a:pPr lvl="2"/>
             <a:r>
-              <a:rPr lang="en-US" smtClean="0"/>
+              <a:rPr lang="en-US"/>
               <a:t>Third level</a:t>
             </a:r>
           </a:p>
           <a:p>
             <a:pPr lvl="3"/>
             <a:r>
-              <a:rPr lang="en-US" smtClean="0"/>
+              <a:rPr lang="en-US"/>
               <a:t>Fourth level</a:t>
             </a:r>
           </a:p>
           <a:p>
             <a:pPr lvl="4"/>
             <a:r>
-              <a:rPr lang="en-US" smtClean="0"/>
+              <a:rPr lang="en-US"/>
               <a:t>Fifth level</a:t>
             </a:r>
-            <a:endParaRPr lang="en-US"/>
           </a:p>
         </p:txBody>
       </p:sp>
@@ -1756,7 +1757,7 @@
             <a:fld id="{4220D634-4DDA-4407-8520-3DB9E0D9BBC1}" type="datetimeFigureOut">
               <a:rPr lang="en-US" smtClean="0"/>
               <a:pPr/>
-              <a:t>10/1/2025</a:t>
+              <a:t>10/3/2025</a:t>
             </a:fld>
             <a:endParaRPr lang="en-US"/>
           </a:p>
@@ -1846,10 +1847,9 @@
           <a:lstStyle/>
           <a:p>
             <a:r>
-              <a:rPr lang="en-US" smtClean="0"/>
+              <a:rPr lang="en-US"/>
               <a:t>Click to edit Master title style</a:t>
             </a:r>
-            <a:endParaRPr lang="en-US"/>
           </a:p>
         </p:txBody>
       </p:sp>
@@ -1871,7 +1871,7 @@
             <a:fld id="{4220D634-4DDA-4407-8520-3DB9E0D9BBC1}" type="datetimeFigureOut">
               <a:rPr lang="en-US" smtClean="0"/>
               <a:pPr/>
-              <a:t>10/1/2025</a:t>
+              <a:t>10/3/2025</a:t>
             </a:fld>
             <a:endParaRPr lang="en-US"/>
           </a:p>
@@ -1963,7 +1963,7 @@
             <a:fld id="{4220D634-4DDA-4407-8520-3DB9E0D9BBC1}" type="datetimeFigureOut">
               <a:rPr lang="en-US" smtClean="0"/>
               <a:pPr/>
-              <a:t>10/1/2025</a:t>
+              <a:t>10/3/2025</a:t>
             </a:fld>
             <a:endParaRPr lang="en-US"/>
           </a:p>
@@ -2062,10 +2062,9 @@
           </a:lstStyle>
           <a:p>
             <a:r>
-              <a:rPr lang="en-US" smtClean="0"/>
+              <a:rPr lang="en-US"/>
               <a:t>Click to edit Master title style</a:t>
             </a:r>
-            <a:endParaRPr lang="en-US"/>
           </a:p>
         </p:txBody>
       </p:sp>
@@ -2119,38 +2118,37 @@
           <a:p>
             <a:pPr lvl="0"/>
             <a:r>
-              <a:rPr lang="en-US" smtClean="0"/>
+              <a:rPr lang="en-US"/>
               <a:t>Click to edit Master text styles</a:t>
             </a:r>
           </a:p>
           <a:p>
             <a:pPr lvl="1"/>
             <a:r>
-              <a:rPr lang="en-US" smtClean="0"/>
+              <a:rPr lang="en-US"/>
               <a:t>Second level</a:t>
             </a:r>
           </a:p>
           <a:p>
             <a:pPr lvl="2"/>
             <a:r>
-              <a:rPr lang="en-US" smtClean="0"/>
+              <a:rPr lang="en-US"/>
               <a:t>Third level</a:t>
             </a:r>
           </a:p>
           <a:p>
             <a:pPr lvl="3"/>
             <a:r>
-              <a:rPr lang="en-US" smtClean="0"/>
+              <a:rPr lang="en-US"/>
               <a:t>Fourth level</a:t>
             </a:r>
           </a:p>
           <a:p>
             <a:pPr lvl="4"/>
             <a:r>
-              <a:rPr lang="en-US" smtClean="0"/>
+              <a:rPr lang="en-US"/>
               <a:t>Fifth level</a:t>
             </a:r>
-            <a:endParaRPr lang="en-US"/>
           </a:p>
         </p:txBody>
       </p:sp>
@@ -2213,7 +2211,7 @@
           <a:p>
             <a:pPr lvl="0"/>
             <a:r>
-              <a:rPr lang="en-US" smtClean="0"/>
+              <a:rPr lang="en-US"/>
               <a:t>Click to edit Master text styles</a:t>
             </a:r>
           </a:p>
@@ -2237,7 +2235,7 @@
             <a:fld id="{4220D634-4DDA-4407-8520-3DB9E0D9BBC1}" type="datetimeFigureOut">
               <a:rPr lang="en-US" smtClean="0"/>
               <a:pPr/>
-              <a:t>10/1/2025</a:t>
+              <a:t>10/3/2025</a:t>
             </a:fld>
             <a:endParaRPr lang="en-US"/>
           </a:p>
@@ -2336,10 +2334,9 @@
           </a:lstStyle>
           <a:p>
             <a:r>
-              <a:rPr lang="en-US" smtClean="0"/>
+              <a:rPr lang="en-US"/>
               <a:t>Click to edit Master title style</a:t>
             </a:r>
-            <a:endParaRPr lang="en-US"/>
           </a:p>
         </p:txBody>
       </p:sp>
@@ -2463,7 +2460,7 @@
           <a:p>
             <a:pPr lvl="0"/>
             <a:r>
-              <a:rPr lang="en-US" smtClean="0"/>
+              <a:rPr lang="en-US"/>
               <a:t>Click to edit Master text styles</a:t>
             </a:r>
           </a:p>
@@ -2487,7 +2484,7 @@
             <a:fld id="{4220D634-4DDA-4407-8520-3DB9E0D9BBC1}" type="datetimeFigureOut">
               <a:rPr lang="en-US" smtClean="0"/>
               <a:pPr/>
-              <a:t>10/1/2025</a:t>
+              <a:t>10/3/2025</a:t>
             </a:fld>
             <a:endParaRPr lang="en-US"/>
           </a:p>
@@ -2592,10 +2589,9 @@
           <a:lstStyle/>
           <a:p>
             <a:r>
-              <a:rPr lang="en-US" smtClean="0"/>
+              <a:rPr lang="en-US"/>
               <a:t>Click to edit Master title style</a:t>
             </a:r>
-            <a:endParaRPr lang="en-US"/>
           </a:p>
         </p:txBody>
       </p:sp>
@@ -2626,38 +2622,37 @@
           <a:p>
             <a:pPr lvl="0"/>
             <a:r>
-              <a:rPr lang="en-US" smtClean="0"/>
+              <a:rPr lang="en-US"/>
               <a:t>Click to edit Master text styles</a:t>
             </a:r>
           </a:p>
           <a:p>
             <a:pPr lvl="1"/>
             <a:r>
-              <a:rPr lang="en-US" smtClean="0"/>
+              <a:rPr lang="en-US"/>
               <a:t>Second level</a:t>
             </a:r>
           </a:p>
           <a:p>
             <a:pPr lvl="2"/>
             <a:r>
-              <a:rPr lang="en-US" smtClean="0"/>
+              <a:rPr lang="en-US"/>
               <a:t>Third level</a:t>
             </a:r>
           </a:p>
           <a:p>
             <a:pPr lvl="3"/>
             <a:r>
-              <a:rPr lang="en-US" smtClean="0"/>
+              <a:rPr lang="en-US"/>
               <a:t>Fourth level</a:t>
             </a:r>
           </a:p>
           <a:p>
             <a:pPr lvl="4"/>
             <a:r>
-              <a:rPr lang="en-US" smtClean="0"/>
+              <a:rPr lang="en-US"/>
               <a:t>Fifth level</a:t>
             </a:r>
-            <a:endParaRPr lang="en-US"/>
           </a:p>
         </p:txBody>
       </p:sp>
@@ -2697,7 +2692,7 @@
             <a:fld id="{4220D634-4DDA-4407-8520-3DB9E0D9BBC1}" type="datetimeFigureOut">
               <a:rPr lang="en-US" smtClean="0"/>
               <a:pPr/>
-              <a:t>10/1/2025</a:t>
+              <a:t>10/3/2025</a:t>
             </a:fld>
             <a:endParaRPr lang="en-US"/>
           </a:p>
@@ -3105,7 +3100,7 @@
           <a:lstStyle/>
           <a:p>
             <a:r>
-              <a:rPr lang="fr-FR" sz="4800" b="1" dirty="0" smtClean="0">
+              <a:rPr lang="fr-FR" sz="4800" b="1" dirty="0">
                 <a:solidFill>
                   <a:schemeClr val="bg1"/>
                 </a:solidFill>
@@ -3151,7 +3146,7 @@
           <a:lstStyle/>
           <a:p>
             <a:r>
-              <a:rPr lang="en-US" sz="2800" b="1" dirty="0" smtClean="0">
+              <a:rPr lang="en-US" sz="2800" b="1" dirty="0">
                 <a:solidFill>
                   <a:schemeClr val="bg1"/>
                 </a:solidFill>
@@ -3159,7 +3154,7 @@
               <a:t>DEPI3-Data </a:t>
             </a:r>
             <a:r>
-              <a:rPr lang="en-US" sz="2800" b="1" dirty="0" err="1" smtClean="0">
+              <a:rPr lang="en-US" sz="2800" b="1" dirty="0" err="1">
                 <a:solidFill>
                   <a:schemeClr val="bg1"/>
                 </a:solidFill>
@@ -3167,18 +3162,13 @@
               <a:t>Analysis_Power</a:t>
             </a:r>
             <a:r>
-              <a:rPr lang="en-US" sz="2800" b="1" dirty="0" smtClean="0">
+              <a:rPr lang="en-US" sz="2800" b="1" dirty="0">
                 <a:solidFill>
                   <a:schemeClr val="bg1"/>
                 </a:solidFill>
               </a:rPr>
               <a:t> Bi</a:t>
             </a:r>
-            <a:endParaRPr lang="en-US" sz="2800" b="1" dirty="0">
-              <a:solidFill>
-                <a:schemeClr val="bg1"/>
-              </a:solidFill>
-            </a:endParaRPr>
           </a:p>
         </p:txBody>
       </p:sp>
@@ -3726,11 +3716,7 @@
           <a:p>
             <a:r>
               <a:rPr lang="en-US" b="1" dirty="0"/>
-              <a:t>Project </a:t>
-            </a:r>
-            <a:r>
-              <a:rPr lang="en-US" b="1" dirty="0" smtClean="0"/>
-              <a:t>Overview</a:t>
+              <a:t>Project Overview</a:t>
             </a:r>
             <a:endParaRPr lang="en-US" dirty="0"/>
           </a:p>
@@ -3846,10 +3832,6 @@
               <a:rPr lang="en-US" b="1" dirty="0"/>
               <a:t>Data Description</a:t>
             </a:r>
-            <a:r>
-              <a:rPr lang="en-US" dirty="0"/>
-              <a:t/>
-            </a:r>
             <a:br>
               <a:rPr lang="en-US" dirty="0"/>
             </a:br>
@@ -3980,7 +3962,7 @@
           <a:lstStyle/>
           <a:p>
             <a:r>
-              <a:rPr lang="en-US" dirty="0" smtClean="0">
+              <a:rPr lang="en-US" dirty="0">
                 <a:solidFill>
                   <a:schemeClr val="tx1"/>
                 </a:solidFill>
@@ -4084,7 +4066,7 @@
           <a:lstStyle/>
           <a:p>
             <a:r>
-              <a:rPr lang="en-US" b="1" dirty="0" smtClean="0"/>
+              <a:rPr lang="en-US" b="1" dirty="0"/>
               <a:t>Data Cleaning</a:t>
             </a:r>
             <a:endParaRPr lang="en-US" dirty="0"/>
@@ -4115,7 +4097,7 @@
           <a:p>
             <a:pPr algn="just"/>
             <a:r>
-              <a:rPr lang="en-US" sz="4000" b="1" dirty="0" smtClean="0">
+              <a:rPr lang="en-US" sz="4000" b="1" dirty="0">
                 <a:solidFill>
                   <a:schemeClr val="tx1"/>
                 </a:solidFill>
@@ -4125,7 +4107,7 @@
           </a:p>
           <a:p>
             <a:pPr lvl="0" algn="just"/>
-            <a:endParaRPr lang="en-US" sz="2300" dirty="0" smtClean="0">
+            <a:endParaRPr lang="en-US" sz="2300" dirty="0">
               <a:solidFill>
                 <a:schemeClr val="tx1"/>
               </a:solidFill>
@@ -4137,7 +4119,7 @@
               <a:buChar char="§"/>
             </a:pPr>
             <a:r>
-              <a:rPr lang="en-US" dirty="0" smtClean="0">
+              <a:rPr lang="en-US" dirty="0">
                 <a:solidFill>
                   <a:schemeClr val="tx1"/>
                 </a:solidFill>
@@ -4151,7 +4133,7 @@
               <a:buChar char="§"/>
             </a:pPr>
             <a:r>
-              <a:rPr lang="en-US" dirty="0" smtClean="0">
+              <a:rPr lang="en-US" dirty="0">
                 <a:solidFill>
                   <a:schemeClr val="tx1"/>
                 </a:solidFill>
@@ -4159,7 +4141,7 @@
               <a:t>Replace “</a:t>
             </a:r>
             <a:r>
-              <a:rPr lang="en-US" b="1" dirty="0" smtClean="0">
+              <a:rPr lang="en-US" b="1" dirty="0">
                 <a:solidFill>
                   <a:schemeClr val="tx1"/>
                 </a:solidFill>
@@ -4167,7 +4149,7 @@
               <a:t>None</a:t>
             </a:r>
             <a:r>
-              <a:rPr lang="en-US" dirty="0" smtClean="0">
+              <a:rPr lang="en-US" dirty="0">
                 <a:solidFill>
                   <a:schemeClr val="tx1"/>
                 </a:solidFill>
@@ -4175,7 +4157,7 @@
               <a:t>” in </a:t>
             </a:r>
             <a:r>
-              <a:rPr lang="en-US" dirty="0" err="1" smtClean="0">
+              <a:rPr lang="en-US" dirty="0" err="1">
                 <a:solidFill>
                   <a:schemeClr val="tx1"/>
                 </a:solidFill>
@@ -4183,7 +4165,7 @@
               <a:t>Railcard</a:t>
             </a:r>
             <a:r>
-              <a:rPr lang="en-US" dirty="0" smtClean="0">
+              <a:rPr lang="en-US" dirty="0">
                 <a:solidFill>
                   <a:schemeClr val="tx1"/>
                 </a:solidFill>
@@ -4191,7 +4173,7 @@
               <a:t> column with “</a:t>
             </a:r>
             <a:r>
-              <a:rPr lang="en-US" b="1" dirty="0" smtClean="0">
+              <a:rPr lang="en-US" b="1" dirty="0">
                 <a:solidFill>
                   <a:schemeClr val="tx1"/>
                 </a:solidFill>
@@ -4199,7 +4181,7 @@
               <a:t>No Card</a:t>
             </a:r>
             <a:r>
-              <a:rPr lang="en-US" dirty="0" smtClean="0">
+              <a:rPr lang="en-US" dirty="0">
                 <a:solidFill>
                   <a:schemeClr val="tx1"/>
                 </a:solidFill>
@@ -4213,7 +4195,7 @@
               <a:buChar char="§"/>
             </a:pPr>
             <a:r>
-              <a:rPr lang="en-US" dirty="0" smtClean="0">
+              <a:rPr lang="en-US" dirty="0">
                 <a:solidFill>
                   <a:schemeClr val="tx1"/>
                 </a:solidFill>
@@ -4221,7 +4203,7 @@
               <a:t>Replace </a:t>
             </a:r>
             <a:r>
-              <a:rPr lang="en-US" b="1" dirty="0" smtClean="0">
+              <a:rPr lang="en-US" b="1" dirty="0">
                 <a:solidFill>
                   <a:schemeClr val="tx1"/>
                 </a:solidFill>
@@ -4229,7 +4211,7 @@
               <a:t>blank</a:t>
             </a:r>
             <a:r>
-              <a:rPr lang="en-US" dirty="0" smtClean="0">
+              <a:rPr lang="en-US" dirty="0">
                 <a:solidFill>
                   <a:schemeClr val="tx1"/>
                 </a:solidFill>
@@ -4237,14 +4219,14 @@
               <a:t> in Reason for Delay column with </a:t>
             </a:r>
             <a:r>
-              <a:rPr lang="en-US" b="1" dirty="0" smtClean="0">
+              <a:rPr lang="en-US" b="1" dirty="0">
                 <a:solidFill>
                   <a:schemeClr val="tx1"/>
                 </a:solidFill>
               </a:rPr>
               <a:t>“No Delay”.</a:t>
             </a:r>
-            <a:endParaRPr lang="en-US" dirty="0" smtClean="0">
+            <a:endParaRPr lang="en-US" dirty="0">
               <a:solidFill>
                 <a:schemeClr val="tx1"/>
               </a:solidFill>
@@ -4256,7 +4238,7 @@
               <a:buChar char="§"/>
             </a:pPr>
             <a:r>
-              <a:rPr lang="en-US" dirty="0" smtClean="0">
+              <a:rPr lang="en-US" dirty="0">
                 <a:solidFill>
                   <a:schemeClr val="tx1"/>
                 </a:solidFill>
@@ -4264,7 +4246,7 @@
               <a:t>Replace </a:t>
             </a:r>
             <a:r>
-              <a:rPr lang="en-US" b="1" dirty="0" smtClean="0">
+              <a:rPr lang="en-US" b="1" dirty="0">
                 <a:solidFill>
                   <a:schemeClr val="tx1"/>
                 </a:solidFill>
@@ -4272,7 +4254,7 @@
               <a:t>“Weather”</a:t>
             </a:r>
             <a:r>
-              <a:rPr lang="en-US" dirty="0" smtClean="0">
+              <a:rPr lang="en-US" dirty="0">
                 <a:solidFill>
                   <a:schemeClr val="tx1"/>
                 </a:solidFill>
@@ -4280,7 +4262,7 @@
               <a:t> in Reason for Delay column with </a:t>
             </a:r>
             <a:r>
-              <a:rPr lang="en-US" b="1" dirty="0" smtClean="0">
+              <a:rPr lang="en-US" b="1" dirty="0">
                 <a:solidFill>
                   <a:schemeClr val="tx1"/>
                 </a:solidFill>
@@ -4288,7 +4270,7 @@
               <a:t>“Weather Conditions”</a:t>
             </a:r>
             <a:r>
-              <a:rPr lang="en-US" dirty="0" smtClean="0">
+              <a:rPr lang="en-US" dirty="0">
                 <a:solidFill>
                   <a:schemeClr val="tx1"/>
                 </a:solidFill>
@@ -4302,7 +4284,7 @@
               <a:buChar char="§"/>
             </a:pPr>
             <a:r>
-              <a:rPr lang="en-US" dirty="0" smtClean="0">
+              <a:rPr lang="en-US" dirty="0">
                 <a:solidFill>
                   <a:schemeClr val="tx1"/>
                 </a:solidFill>
@@ -4310,7 +4292,7 @@
               <a:t>Replace </a:t>
             </a:r>
             <a:r>
-              <a:rPr lang="en-US" b="1" dirty="0" smtClean="0">
+              <a:rPr lang="en-US" b="1" dirty="0">
                 <a:solidFill>
                   <a:schemeClr val="tx1"/>
                 </a:solidFill>
@@ -4318,7 +4300,7 @@
               <a:t>“Staffing” </a:t>
             </a:r>
             <a:r>
-              <a:rPr lang="en-US" dirty="0" smtClean="0">
+              <a:rPr lang="en-US" dirty="0">
                 <a:solidFill>
                   <a:schemeClr val="tx1"/>
                 </a:solidFill>
@@ -4326,7 +4308,7 @@
               <a:t>in Reason for Delay column with </a:t>
             </a:r>
             <a:r>
-              <a:rPr lang="en-US" b="1" dirty="0" smtClean="0">
+              <a:rPr lang="en-US" b="1" dirty="0">
                 <a:solidFill>
                   <a:schemeClr val="tx1"/>
                 </a:solidFill>
@@ -4334,7 +4316,7 @@
               <a:t>“Staffing shortage”</a:t>
             </a:r>
             <a:r>
-              <a:rPr lang="en-US" dirty="0" smtClean="0">
+              <a:rPr lang="en-US" dirty="0">
                 <a:solidFill>
                   <a:schemeClr val="tx1"/>
                 </a:solidFill>
@@ -4348,7 +4330,7 @@
               <a:buChar char="§"/>
             </a:pPr>
             <a:r>
-              <a:rPr lang="en-US" dirty="0" smtClean="0">
+              <a:rPr lang="en-US" dirty="0">
                 <a:solidFill>
                   <a:schemeClr val="tx1"/>
                 </a:solidFill>
@@ -4356,7 +4338,7 @@
               <a:t>Replace </a:t>
             </a:r>
             <a:r>
-              <a:rPr lang="en-US" b="1" dirty="0" smtClean="0">
+              <a:rPr lang="en-US" b="1" dirty="0">
                 <a:solidFill>
                   <a:schemeClr val="tx1"/>
                 </a:solidFill>
@@ -4364,7 +4346,7 @@
               <a:t>“Signal failure” </a:t>
             </a:r>
             <a:r>
-              <a:rPr lang="en-US" dirty="0" smtClean="0">
+              <a:rPr lang="en-US" dirty="0">
                 <a:solidFill>
                   <a:schemeClr val="tx1"/>
                 </a:solidFill>
@@ -4372,7 +4354,7 @@
               <a:t>in Reason for Delay column with </a:t>
             </a:r>
             <a:r>
-              <a:rPr lang="en-US" b="1" dirty="0" smtClean="0">
+              <a:rPr lang="en-US" b="1" dirty="0">
                 <a:solidFill>
                   <a:schemeClr val="tx1"/>
                 </a:solidFill>
@@ -4380,7 +4362,7 @@
               <a:t>“Signal Failure”</a:t>
             </a:r>
             <a:r>
-              <a:rPr lang="en-US" dirty="0" smtClean="0">
+              <a:rPr lang="en-US" dirty="0">
                 <a:solidFill>
                   <a:schemeClr val="tx1"/>
                 </a:solidFill>
@@ -4394,7 +4376,7 @@
               <a:buChar char="§"/>
             </a:pPr>
             <a:r>
-              <a:rPr lang="en-US" dirty="0" smtClean="0">
+              <a:rPr lang="en-US" dirty="0">
                 <a:solidFill>
                   <a:schemeClr val="tx1"/>
                 </a:solidFill>
@@ -4402,7 +4384,7 @@
               <a:t>Add new column called </a:t>
             </a:r>
             <a:r>
-              <a:rPr lang="en-US" b="1" dirty="0" smtClean="0">
+              <a:rPr lang="en-US" b="1" dirty="0">
                 <a:solidFill>
                   <a:schemeClr val="tx1"/>
                 </a:solidFill>
@@ -4410,7 +4392,7 @@
               <a:t>“Reservation Period In Days”</a:t>
             </a:r>
             <a:r>
-              <a:rPr lang="en-US" dirty="0" smtClean="0">
+              <a:rPr lang="en-US" dirty="0">
                 <a:solidFill>
                   <a:schemeClr val="tx1"/>
                 </a:solidFill>
@@ -4424,7 +4406,7 @@
               <a:buChar char="§"/>
             </a:pPr>
             <a:r>
-              <a:rPr lang="en-US" dirty="0" smtClean="0">
+              <a:rPr lang="en-US" dirty="0">
                 <a:solidFill>
                   <a:schemeClr val="tx1"/>
                 </a:solidFill>
@@ -4432,7 +4414,7 @@
               <a:t>Add new column called </a:t>
             </a:r>
             <a:r>
-              <a:rPr lang="en-US" b="1" dirty="0" smtClean="0">
+              <a:rPr lang="en-US" b="1" dirty="0">
                 <a:solidFill>
                   <a:schemeClr val="tx1"/>
                 </a:solidFill>
@@ -4440,7 +4422,7 @@
               <a:t>“Delayed In Minutes”</a:t>
             </a:r>
             <a:r>
-              <a:rPr lang="en-US" dirty="0" smtClean="0">
+              <a:rPr lang="en-US" dirty="0">
                 <a:solidFill>
                   <a:schemeClr val="tx1"/>
                 </a:solidFill>
@@ -4454,7 +4436,7 @@
               <a:buChar char="§"/>
             </a:pPr>
             <a:r>
-              <a:rPr lang="en-US" dirty="0" smtClean="0">
+              <a:rPr lang="en-US" dirty="0">
                 <a:solidFill>
                   <a:schemeClr val="tx1"/>
                 </a:solidFill>
@@ -4462,7 +4444,7 @@
               <a:t>Add new column called </a:t>
             </a:r>
             <a:r>
-              <a:rPr lang="en-US" b="1" dirty="0" smtClean="0">
+              <a:rPr lang="en-US" b="1" dirty="0">
                 <a:solidFill>
                   <a:schemeClr val="tx1"/>
                 </a:solidFill>
@@ -4470,7 +4452,7 @@
               <a:t>“Day of Journey”</a:t>
             </a:r>
             <a:r>
-              <a:rPr lang="en-US" dirty="0" smtClean="0">
+              <a:rPr lang="en-US" dirty="0">
                 <a:solidFill>
                   <a:schemeClr val="tx1"/>
                 </a:solidFill>
@@ -4551,7 +4533,7 @@
           <a:lstStyle/>
           <a:p>
             <a:r>
-              <a:rPr lang="en-US" b="1" dirty="0" smtClean="0"/>
+              <a:rPr lang="en-US" b="1" dirty="0"/>
               <a:t>Data Cleaning</a:t>
             </a:r>
             <a:endParaRPr lang="en-US" dirty="0"/>
@@ -4581,7 +4563,7 @@
           <a:lstStyle/>
           <a:p>
             <a:r>
-              <a:rPr lang="en-US" dirty="0" smtClean="0">
+              <a:rPr lang="en-US" dirty="0">
                 <a:solidFill>
                   <a:schemeClr val="tx1"/>
                 </a:solidFill>
@@ -4589,7 +4571,7 @@
               <a:t>Power Query </a:t>
             </a:r>
             <a:r>
-              <a:rPr lang="en-US" sz="2800" dirty="0" smtClean="0">
+              <a:rPr lang="en-US" sz="2800" dirty="0">
                 <a:solidFill>
                   <a:schemeClr val="tx1"/>
                 </a:solidFill>
@@ -4598,7 +4580,7 @@
             </a:r>
           </a:p>
           <a:p>
-            <a:endParaRPr lang="en-US" sz="2800" dirty="0" smtClean="0">
+            <a:endParaRPr lang="en-US" sz="2800" dirty="0">
               <a:solidFill>
                 <a:schemeClr val="tx1"/>
               </a:solidFill>
@@ -4701,7 +4683,7 @@
           <a:lstStyle/>
           <a:p>
             <a:r>
-              <a:rPr lang="en-US" altLang="zh-CN" b="1" dirty="0" smtClean="0">
+              <a:rPr lang="en-US" altLang="zh-CN" b="1" dirty="0">
                 <a:solidFill>
                   <a:srgbClr val="1B1B1B"/>
                 </a:solidFill>
@@ -4714,23 +4696,7 @@
                 </a:effectLst>
                 <a:ea typeface="阿里巴巴普惠体 Medium" pitchFamily="18" charset="-122"/>
               </a:rPr>
-              <a:t>Data </a:t>
-            </a:r>
-            <a:r>
-              <a:rPr lang="en-US" altLang="zh-CN" b="1" dirty="0" smtClean="0">
-                <a:solidFill>
-                  <a:srgbClr val="1B1B1B"/>
-                </a:solidFill>
-                <a:effectLst>
-                  <a:outerShdw blurRad="25400" dist="25400" dir="2700000" algn="tl">
-                    <a:srgbClr val="000000">
-                      <a:alpha val="25000"/>
-                    </a:srgbClr>
-                  </a:outerShdw>
-                </a:effectLst>
-                <a:ea typeface="阿里巴巴普惠体 Medium" pitchFamily="18" charset="-122"/>
-              </a:rPr>
-              <a:t>Modeling</a:t>
+              <a:t>Data Modeling</a:t>
             </a:r>
             <a:endParaRPr lang="en-US" dirty="0"/>
           </a:p>
@@ -4769,22 +4735,34 @@
       </p:sp>
       <p:pic>
         <p:nvPicPr>
-          <p:cNvPr id="4" name="Picture 3" descr="Untitled.png"/>
+          <p:cNvPr id="6" name="Picture 5" descr="A screenshot of a computer">
+            <a:extLst>
+              <a:ext uri="{FF2B5EF4-FFF2-40B4-BE49-F238E27FC236}">
+                <a16:creationId xmlns:a16="http://schemas.microsoft.com/office/drawing/2014/main" id="{741D9791-D7E1-58B2-2027-E74C794346E5}"/>
+              </a:ext>
+            </a:extLst>
+          </p:cNvPr>
           <p:cNvPicPr>
             <a:picLocks noChangeAspect="1"/>
           </p:cNvPicPr>
           <p:nvPr/>
         </p:nvPicPr>
         <p:blipFill>
-          <a:blip r:embed="rId3"/>
+          <a:blip r:embed="rId3">
+            <a:extLst>
+              <a:ext uri="{28A0092B-C50C-407E-A947-70E740481C1C}">
+                <a14:useLocalDpi xmlns:a14="http://schemas.microsoft.com/office/drawing/2010/main" val="0"/>
+              </a:ext>
+            </a:extLst>
+          </a:blip>
           <a:stretch>
             <a:fillRect/>
           </a:stretch>
         </p:blipFill>
         <p:spPr>
           <a:xfrm>
-            <a:off x="457200" y="1143000"/>
-            <a:ext cx="8165974" cy="5400993"/>
+            <a:off x="439147" y="1219200"/>
+            <a:ext cx="8123639" cy="4876800"/>
           </a:xfrm>
           <a:prstGeom prst="rect">
             <a:avLst/>
